--- a/dist/초2/사회·역사/변화와다양성/초2_사회·역사_변화와다양성_01_옛날과오늘.pptx
+++ b/dist/초2/사회·역사/변화와다양성/초2_사회·역사_변화와다양성_01_옛날과오늘.pptx
@@ -120,13 +120,13 @@
   <p:extLst>
     <p:ext uri="{521415D9-36F7-43E2-AB2F-B90AF26B5E84}">
       <p14:sectionLst xmlns:p14="http://schemas.microsoft.com/office/powerpoint/2010/main">
-        <p14:section name="도입" id="{9b9aae31-9961-3d3e-1254-f4c6897fd3c9}">
+        <p14:section name="도입" id="{f326b0f3-326f-b7b0-e1f3-8be7f1f5fe58}">
           <p14:sldIdLst>
             <p14:sldId id="256"/>
             <p14:sldId id="257"/>
           </p14:sldIdLst>
         </p14:section>
-        <p14:section name="개념" id="{f4abe3b4-0a38-7d07-f745-09d52bb9406e}">
+        <p14:section name="개념" id="{cf940f2e-da66-5152-3534-e6874e4a01b9}">
           <p14:sldIdLst>
             <p14:sldId id="258"/>
             <p14:sldId id="259"/>
@@ -134,32 +134,32 @@
             <p14:sldId id="263"/>
           </p14:sldIdLst>
         </p14:section>
-        <p14:section name="연습" id="{6143a681-008f-a567-5241-8daeb4d7e2ab}">
+        <p14:section name="연습" id="{00e428e9-e197-ac67-bd90-562877a5274d}">
           <p14:sldIdLst>
             <p14:sldId id="261"/>
             <p14:sldId id="262"/>
             <p14:sldId id="264"/>
           </p14:sldIdLst>
         </p14:section>
-        <p14:section name="개념" id="{1027ace4-46dd-f040-dfb6-9d8d74b26372}">
+        <p14:section name="개념" id="{fd123e41-fa59-ca76-3883-0d25bbab6f8b}">
           <p14:sldIdLst/>
         </p14:section>
-        <p14:section name="연습" id="{0fe69a4a-6ce4-70dc-2ce7-09dfc233eef9}">
+        <p14:section name="연습" id="{43182dee-8fa7-f05b-cd58-355394284f16}">
           <p14:sldIdLst/>
         </p14:section>
-        <p14:section name="확인" id="{999a058f-fccf-6515-5eea-9f33eb879582}">
+        <p14:section name="확인" id="{37ff87cb-b997-d9d7-166f-bbdba8df4ccb}">
           <p14:sldIdLst>
             <p14:sldId id="265"/>
             <p14:sldId id="266"/>
             <p14:sldId id="267"/>
           </p14:sldIdLst>
         </p14:section>
-        <p14:section name="정리" id="{a96a95b1-9b8d-05b0-c13a-35d2e4dc6b3b}">
+        <p14:section name="정리" id="{1c55c3eb-5031-a30d-b879-d5fcfa7d294b}">
           <p14:sldIdLst>
             <p14:sldId id="268"/>
           </p14:sldIdLst>
         </p14:section>
-        <p14:section name="보충" id="{4c5841af-4eec-56eb-04da-9a61d4468509}">
+        <p14:section name="보충" id="{dcfb78f6-641e-4aef-39a6-6fe6fa081b2c}">
           <p14:sldIdLst>
             <p14:sldId id="269"/>
           </p14:sldIdLst>
@@ -1084,7 +1084,7 @@
 막히면
 - 아기 때 사진이 있으면 함께 보며 그때 쓰던 물건을 찾아봅니다(선택).
 주의
-- 이 차시는 계획상 앞 차시가 없습니다. 보충으로도 어려우면 1학년 ‘나의 하루’(KR22-G01-SOC-MYDAY-L01)와 가까운 내용이므로, 며칠 동안 저녁마다 ‘오늘 한 일’과 ‘어제 한 일’을 말하는 놀이를 한 뒤 S02부터 다시 시작합니다.
+- 보충으로도 어려우면 앞 차시인 1학년 ‘나의 하루’(KR22-G01-SOC-MYDAY-L01)를 다시 보거나, 며칠 동안 저녁마다 ‘오늘 한 일’과 ‘어제 한 일’을 말하는 놀이를 한 뒤 S02부터 다시 시작합니다.
 - 보충이 오래 걸리면 오늘은 여기까지 하고 다음 날 S02부터 다시 시작합니다.</a:t>
             </a:r>
             <a:endParaRPr lang="en-US" dirty="0"/>
@@ -1183,7 +1183,7 @@
 - ① “우유요.” “이유식이요.” ② “밥이요.” ③ “놀이터에서 놀았어요.”
 막히면
 - “아기 때는 이가 없었어. 그럼 밥을 먹을 수 있었을까?”처럼 힌트를 줍니다.
-- 예전과 지금을 구별해 말하기 어려워하면 S14(보충)를 먼저 합니다. 이 차시는 계획상 앞 차시가 없습니다. 보충으로도 어려우면 1학년 ‘나의 하루’(KR22-G01-SOC-MYDAY-L01)와 가까운 내용이므로, 며칠 동안 저녁마다 ‘오늘 한 일’과 ‘어제 한 일’을 말하는 놀이를 한 뒤 S02부터 다시 시작합니다.
+- 예전과 지금을 구별해 말하기 어려워하면 S14(보충)를 먼저 합니다. 보충으로도 어려우면 앞 차시인 1학년 ‘나의 하루’(KR22-G01-SOC-MYDAY-L01)를 다시 보거나, 며칠 동안 저녁마다 ‘오늘 한 일’과 ‘어제 한 일’을 말하는 놀이를 한 뒤 S02부터 다시 시작합니다.
 주의
 - 답이 정확하지 않아도 ‘예전’과 ‘지금’을 나누어 말하면 됩니다.</a:t>
             </a:r>
